--- a/outputs/decks/AvePoint_Executive_Summary.pptx
+++ b/outputs/decks/AvePoint_Executive_Summary.pptx
@@ -4565,15 +4565,39 @@
           </a:p>
         </p:txBody>
       </p:sp>
-      <p:sp>
-        <p:nvSpPr>
-          <p:cNvPr id="5" name="TextBox 4"/>
+      <p:pic>
+        <p:nvPicPr>
+          <p:cNvPr id="5" name="Picture 4" descr="05_all_framings.png"/>
+          <p:cNvPicPr>
+            <a:picLocks noChangeAspect="1"/>
+          </p:cNvPicPr>
+          <p:nvPr/>
+        </p:nvPicPr>
+        <p:blipFill>
+          <a:blip r:embed="rId2"/>
+          <a:stretch>
+            <a:fillRect/>
+          </a:stretch>
+        </p:blipFill>
+        <p:spPr>
+          <a:xfrm>
+            <a:off x="3514759" y="2103120"/>
+            <a:ext cx="5162177" cy="1755648"/>
+          </a:xfrm>
+          <a:prstGeom prst="rect">
+            <a:avLst/>
+          </a:prstGeom>
+        </p:spPr>
+      </p:pic>
+      <p:sp>
+        <p:nvSpPr>
+          <p:cNvPr id="6" name="TextBox 5"/>
           <p:cNvSpPr txBox="1"/>
           <p:nvPr/>
         </p:nvSpPr>
         <p:spPr>
           <a:xfrm>
-            <a:off x="685800" y="2139696"/>
+            <a:off x="685800" y="3968496"/>
             <a:ext cx="10820095" cy="4572000"/>
           </a:xfrm>
           <a:prstGeom prst="rect">
@@ -4593,13 +4617,13 @@
               </a:spcAft>
             </a:pPr>
             <a:r>
-              <a:rPr sz="1350" b="1" i="0">
+              <a:rPr sz="1250" b="1" i="0">
                 <a:solidFill>
                   <a:srgbClr val="1A1A1A"/>
                 </a:solidFill>
                 <a:latin typeface="Calibri"/>
               </a:rPr>
-              <a:t>We tried three genuinely different approaches. None beat chance once we account for having tried many.</a:t>
+              <a:t>The reason is the data, and it is now specific.</a:t>
             </a:r>
           </a:p>
           <a:p>
@@ -4609,13 +4633,29 @@
               </a:spcAft>
             </a:pPr>
             <a:r>
-              <a:rPr sz="1150" b="0" i="0">
+              <a:rPr sz="1050" b="0" i="0">
                 <a:solidFill>
                   <a:srgbClr val="5A6270"/>
                 </a:solidFill>
                 <a:latin typeface="Calibri"/>
               </a:rPr>
-              <a:t>Best model: AUC 0.58, on a scale where 0.50 is a coin flip and 1.00 is perfect. Its uncertainty spans AUC 0.37 to 0.75, the same search on deliberately scrambled data reached AUC 0.58 or better in 7 of 20 attempts, and priced for the fact that we picked the winner it is AUC 0.53.</a:t>
+              <a:t>Product usage and support tickets are not tied to the customers they describe. Their dates are scattered at random across the whole two years, which is why three-quarters of usage rows are dated before the subscription they belong to and half the tickets before the customer existed.</a:t>
+            </a:r>
+          </a:p>
+          <a:p>
+            <a:pPr lvl="1">
+              <a:spcAft>
+                <a:spcPts val="300"/>
+              </a:spcAft>
+            </a:pPr>
+            <a:r>
+              <a:rPr sz="1050" b="0" i="0">
+                <a:solidFill>
+                  <a:srgbClr val="5A6270"/>
+                </a:solidFill>
+                <a:latin typeface="Calibri"/>
+              </a:rPr>
+              <a:t>The thing we are predicting is a random date too, as slide 2 shows. And three sources disagree on who churned: they agree on about one account in five, which is what two unrelated columns would do.</a:t>
             </a:r>
           </a:p>
           <a:p>
@@ -4641,13 +4681,13 @@
               </a:spcAft>
             </a:pPr>
             <a:r>
-              <a:rPr sz="1350" b="1" i="0">
+              <a:rPr sz="1250" b="1" i="0">
                 <a:solidFill>
                   <a:srgbClr val="1A1A1A"/>
                 </a:solidFill>
                 <a:latin typeface="Calibri"/>
               </a:rPr>
-              <a:t>The reason is the data, and it is now specific.</a:t>
+              <a:t>How firm is this? Firmer for some parts than others.</a:t>
             </a:r>
           </a:p>
           <a:p>
@@ -4657,45 +4697,13 @@
               </a:spcAft>
             </a:pPr>
             <a:r>
-              <a:rPr sz="1150" b="0" i="0">
+              <a:rPr sz="1050" b="0" i="0">
                 <a:solidFill>
                   <a:srgbClr val="5A6270"/>
                 </a:solidFill>
                 <a:latin typeface="Calibri"/>
               </a:rPr>
-              <a:t>Product usage and support tickets are not tied to the customers they describe. Their dates are scattered at random across the whole two years, which is why three-quarters of usage rows are dated before the subscription they belong to and half the tickets before the customer existed.</a:t>
-            </a:r>
-          </a:p>
-          <a:p>
-            <a:pPr lvl="1">
-              <a:spcAft>
-                <a:spcPts val="300"/>
-              </a:spcAft>
-            </a:pPr>
-            <a:r>
-              <a:rPr sz="1150" b="0" i="0">
-                <a:solidFill>
-                  <a:srgbClr val="5A6270"/>
-                </a:solidFill>
-                <a:latin typeface="Calibri"/>
-              </a:rPr>
-              <a:t>The thing we are predicting is a random date too, as slide 2 shows.</a:t>
-            </a:r>
-          </a:p>
-          <a:p>
-            <a:pPr lvl="1">
-              <a:spcAft>
-                <a:spcPts val="300"/>
-              </a:spcAft>
-            </a:pPr>
-            <a:r>
-              <a:rPr sz="1150" b="0" i="0">
-                <a:solidFill>
-                  <a:srgbClr val="5A6270"/>
-                </a:solidFill>
-                <a:latin typeface="Calibri"/>
-              </a:rPr>
-              <a:t>Three sources disagree on who churned: they agree on about one account in five, which is what two unrelated columns would do.</a:t>
+              <a:t>For usage and support we can say there is nothing there: those records were never linked to the customer in the first place. For customer characteristics — industry, plan, size — the honest claim is that we could not detect anything with 54 churners, not that nothing exists.</a:t>
             </a:r>
           </a:p>
           <a:p>
@@ -4721,119 +4729,7 @@
               </a:spcAft>
             </a:pPr>
             <a:r>
-              <a:rPr sz="1350" b="1" i="0">
-                <a:solidFill>
-                  <a:srgbClr val="1A1A1A"/>
-                </a:solidFill>
-                <a:latin typeface="Calibri"/>
-              </a:rPr>
-              <a:t>How firm is this? Firmer for some parts than others.</a:t>
-            </a:r>
-          </a:p>
-          <a:p>
-            <a:pPr lvl="1">
-              <a:spcAft>
-                <a:spcPts val="300"/>
-              </a:spcAft>
-            </a:pPr>
-            <a:r>
-              <a:rPr sz="1150" b="0" i="0">
-                <a:solidFill>
-                  <a:srgbClr val="5A6270"/>
-                </a:solidFill>
-                <a:latin typeface="Calibri"/>
-              </a:rPr>
-              <a:t>For usage and support we can say there is nothing there, because those records were never linked to the customer in the first place.</a:t>
-            </a:r>
-          </a:p>
-          <a:p>
-            <a:pPr lvl="1">
-              <a:spcAft>
-                <a:spcPts val="300"/>
-              </a:spcAft>
-            </a:pPr>
-            <a:r>
-              <a:rPr sz="1150" b="0" i="0">
-                <a:solidFill>
-                  <a:srgbClr val="5A6270"/>
-                </a:solidFill>
-                <a:latin typeface="Calibri"/>
-              </a:rPr>
-              <a:t>For customer characteristics — industry, plan, size — the honest claim is that we could not detect anything with 54 churners, not that nothing exists.</a:t>
-            </a:r>
-          </a:p>
-          <a:p>
-            <a:pPr>
-              <a:spcAft>
-                <a:spcPts val="300"/>
-              </a:spcAft>
-            </a:pPr>
-            <a:r>
-              <a:rPr sz="600" b="0" i="0">
-                <a:solidFill>
-                  <a:srgbClr val="1A1A1A"/>
-                </a:solidFill>
-                <a:latin typeface="Calibri"/>
-              </a:rPr>
-              <a:t> </a:t>
-            </a:r>
-          </a:p>
-          <a:p>
-            <a:pPr>
-              <a:spcAft>
-                <a:spcPts val="300"/>
-              </a:spcAft>
-            </a:pPr>
-            <a:r>
-              <a:rPr sz="1350" b="1" i="0">
-                <a:solidFill>
-                  <a:srgbClr val="1A1A1A"/>
-                </a:solidFill>
-                <a:latin typeface="Calibri"/>
-              </a:rPr>
-              <a:t>The warning time we would need makes it harder, not easier.</a:t>
-            </a:r>
-          </a:p>
-          <a:p>
-            <a:pPr lvl="1">
-              <a:spcAft>
-                <a:spcPts val="300"/>
-              </a:spcAft>
-            </a:pPr>
-            <a:r>
-              <a:rPr sz="1150" b="0" i="0">
-                <a:solidFill>
-                  <a:srgbClr val="5A6270"/>
-                </a:solidFill>
-                <a:latin typeface="Calibri"/>
-              </a:rPr>
-              <a:t>Asking for 30 days of notice, so somebody could act, moves every horizon into the AUC 0.42 to 0.52 band. A prediction that arrives too late to use is not useful.</a:t>
-            </a:r>
-          </a:p>
-          <a:p>
-            <a:pPr>
-              <a:spcAft>
-                <a:spcPts val="300"/>
-              </a:spcAft>
-            </a:pPr>
-            <a:r>
-              <a:rPr sz="600" b="0" i="0">
-                <a:solidFill>
-                  <a:srgbClr val="1A1A1A"/>
-                </a:solidFill>
-                <a:latin typeface="Calibri"/>
-              </a:rPr>
-              <a:t> </a:t>
-            </a:r>
-          </a:p>
-          <a:p>
-            <a:pPr>
-              <a:spcAft>
-                <a:spcPts val="300"/>
-              </a:spcAft>
-            </a:pPr>
-            <a:r>
-              <a:rPr sz="1350" b="1" i="0">
+              <a:rPr sz="1250" b="1" i="0">
                 <a:solidFill>
                   <a:srgbClr val="2E5F8A"/>
                 </a:solidFill>
@@ -4846,7 +4742,7 @@
       </p:sp>
       <p:sp>
         <p:nvSpPr>
-          <p:cNvPr id="6" name="TextBox 5"/>
+          <p:cNvPr id="7" name="TextBox 6"/>
           <p:cNvSpPr txBox="1"/>
           <p:nvPr/>
         </p:nvSpPr>
@@ -4873,7 +4769,7 @@
                 </a:solidFill>
                 <a:latin typeface="Calibri"/>
               </a:rPr>
-              <a:t>AUC is ranking accuracy: 0.50 is a coin flip, 1.00 is perfect. The metric is not doing the work — precision-recall and F1 agree, and on F1 the model beats a no-model policy by less than the optimism in its own tuned threshold. Ladder and null tests in the technical deck.</a:t>
+              <a:t>The scale: pick one customer who left and one who stayed — the number is the chance the model scored the leaver as riskier. 0.50 is a coin toss, 1.00 is always right. The faint bars are how far the score moves between test splits. The bottom row is the one that matters operationally: ask for 30 days of warning, so somebody can act, and it lands below a coin toss. Precision-recall and F1 agree, and on F1 the model beats a no-model policy by less than the optimism in its own tuned threshold. Ladder and null tests in the technical deck.</a:t>
             </a:r>
           </a:p>
         </p:txBody>
